--- a/slides/Week5_Recap.pptx
+++ b/slides/Week5_Recap.pptx
@@ -199,10 +199,33 @@
   <pc:docChgLst>
     <pc:chgData name="Zhao Jin" userId="cd05a825-544c-438a-9ba1-08e63db50b47" providerId="ADAL" clId="{5DF3A229-1965-414E-AF54-F4C37AC7DF68}"/>
     <pc:docChg chg="undo custSel addSld delSld modSld sldOrd">
-      <pc:chgData name="Zhao Jin" userId="cd05a825-544c-438a-9ba1-08e63db50b47" providerId="ADAL" clId="{5DF3A229-1965-414E-AF54-F4C37AC7DF68}" dt="2026-02-19T02:15:08.223" v="622" actId="20577"/>
+      <pc:chgData name="Zhao Jin" userId="cd05a825-544c-438a-9ba1-08e63db50b47" providerId="ADAL" clId="{5DF3A229-1965-414E-AF54-F4C37AC7DF68}" dt="2026-02-19T03:18:41.838" v="626" actId="166"/>
       <pc:docMkLst>
         <pc:docMk/>
       </pc:docMkLst>
+      <pc:sldChg chg="modSp mod">
+        <pc:chgData name="Zhao Jin" userId="cd05a825-544c-438a-9ba1-08e63db50b47" providerId="ADAL" clId="{5DF3A229-1965-414E-AF54-F4C37AC7DF68}" dt="2026-02-19T03:18:41.838" v="626" actId="166"/>
+        <pc:sldMkLst>
+          <pc:docMk/>
+          <pc:sldMk cId="754083244" sldId="553"/>
+        </pc:sldMkLst>
+        <pc:spChg chg="ord">
+          <ac:chgData name="Zhao Jin" userId="cd05a825-544c-438a-9ba1-08e63db50b47" providerId="ADAL" clId="{5DF3A229-1965-414E-AF54-F4C37AC7DF68}" dt="2026-02-19T03:18:41.838" v="626" actId="166"/>
+          <ac:spMkLst>
+            <pc:docMk/>
+            <pc:sldMk cId="754083244" sldId="553"/>
+            <ac:spMk id="84" creationId="{DE7127C1-D47B-3069-6716-AFCD1F6541DA}"/>
+          </ac:spMkLst>
+        </pc:spChg>
+        <pc:picChg chg="mod">
+          <ac:chgData name="Zhao Jin" userId="cd05a825-544c-438a-9ba1-08e63db50b47" providerId="ADAL" clId="{5DF3A229-1965-414E-AF54-F4C37AC7DF68}" dt="2026-02-19T03:09:30.644" v="625" actId="1076"/>
+          <ac:picMkLst>
+            <pc:docMk/>
+            <pc:sldMk cId="754083244" sldId="553"/>
+            <ac:picMk id="3" creationId="{168F5031-919A-B0D5-243B-A05F5BA81D97}"/>
+          </ac:picMkLst>
+        </pc:picChg>
+      </pc:sldChg>
       <pc:sldChg chg="modSp">
         <pc:chgData name="Zhao Jin" userId="cd05a825-544c-438a-9ba1-08e63db50b47" providerId="ADAL" clId="{5DF3A229-1965-414E-AF54-F4C37AC7DF68}" dt="2026-02-19T02:14:21.570" v="555"/>
         <pc:sldMkLst>
@@ -20550,7 +20573,7 @@
               </a:tabLst>
             </a:pPr>
             <a:r>
-              <a:rPr lang="en-US" b="1">
+              <a:rPr lang="en-US" b="1" dirty="0">
                 <a:solidFill>
                   <a:srgbClr val="0000FF"/>
                 </a:solidFill>
@@ -20560,7 +20583,7 @@
               <a:t>long</a:t>
             </a:r>
             <a:r>
-              <a:rPr lang="en-US" b="1">
+              <a:rPr lang="en-US" b="1" dirty="0">
                 <a:solidFill>
                   <a:schemeClr val="tx1"/>
                 </a:solidFill>
@@ -20570,7 +20593,7 @@
               <a:t> factorial(</a:t>
             </a:r>
             <a:r>
-              <a:rPr lang="en-US" b="1">
+              <a:rPr lang="en-US" b="1" dirty="0">
                 <a:solidFill>
                   <a:srgbClr val="0000FF"/>
                 </a:solidFill>
@@ -20580,7 +20603,7 @@
               <a:t>long</a:t>
             </a:r>
             <a:r>
-              <a:rPr lang="en-US" b="1">
+              <a:rPr lang="en-US" b="1" dirty="0">
                 <a:solidFill>
                   <a:schemeClr val="tx1"/>
                 </a:solidFill>
@@ -20601,7 +20624,7 @@
               </a:tabLst>
             </a:pPr>
             <a:r>
-              <a:rPr lang="en-US" b="1">
+              <a:rPr lang="en-US" b="1" dirty="0">
                 <a:solidFill>
                   <a:schemeClr val="tx1"/>
                 </a:solidFill>
@@ -20622,7 +20645,7 @@
               </a:tabLst>
             </a:pPr>
             <a:r>
-              <a:rPr lang="en-US" b="1">
+              <a:rPr lang="en-US" b="1" dirty="0">
                 <a:solidFill>
                   <a:schemeClr val="tx1"/>
                 </a:solidFill>
@@ -20632,7 +20655,7 @@
               <a:t>    </a:t>
             </a:r>
             <a:r>
-              <a:rPr lang="en-US" b="1">
+              <a:rPr lang="en-US" b="1" dirty="0">
                 <a:solidFill>
                   <a:srgbClr val="0000FF"/>
                 </a:solidFill>
@@ -20642,7 +20665,7 @@
               <a:t>long</a:t>
             </a:r>
             <a:r>
-              <a:rPr lang="en-US" b="1">
+              <a:rPr lang="en-US" b="1" dirty="0">
                 <a:solidFill>
                   <a:schemeClr val="tx1"/>
                 </a:solidFill>
@@ -20663,7 +20686,7 @@
               </a:tabLst>
             </a:pPr>
             <a:r>
-              <a:rPr lang="en-US" b="1">
+              <a:rPr lang="en-US" b="1" dirty="0">
                 <a:solidFill>
                   <a:schemeClr val="tx1"/>
                 </a:solidFill>
@@ -20673,7 +20696,7 @@
               <a:t>    </a:t>
             </a:r>
             <a:r>
-              <a:rPr lang="en-US" b="1">
+              <a:rPr lang="en-US" b="1" dirty="0">
                 <a:solidFill>
                   <a:srgbClr val="0000FF"/>
                 </a:solidFill>
@@ -20683,7 +20706,7 @@
               <a:t>if</a:t>
             </a:r>
             <a:r>
-              <a:rPr lang="en-US" b="1">
+              <a:rPr lang="en-US" b="1" dirty="0">
                 <a:solidFill>
                   <a:schemeClr val="tx1"/>
                 </a:solidFill>
@@ -20693,7 +20716,7 @@
               <a:t> (n == </a:t>
             </a:r>
             <a:r>
-              <a:rPr lang="en-US" b="1">
+              <a:rPr lang="en-US" b="1" dirty="0">
                 <a:solidFill>
                   <a:srgbClr val="C00000"/>
                 </a:solidFill>
@@ -20703,7 +20726,7 @@
               <a:t>0</a:t>
             </a:r>
             <a:r>
-              <a:rPr lang="en-US" b="1">
+              <a:rPr lang="en-US" b="1" dirty="0">
                 <a:solidFill>
                   <a:schemeClr val="tx1"/>
                 </a:solidFill>
@@ -20724,7 +20747,7 @@
               </a:tabLst>
             </a:pPr>
             <a:r>
-              <a:rPr lang="en-US" b="1">
+              <a:rPr lang="en-US" b="1" dirty="0">
                 <a:solidFill>
                   <a:schemeClr val="tx1"/>
                 </a:solidFill>
@@ -20734,7 +20757,7 @@
               <a:t>        answer = </a:t>
             </a:r>
             <a:r>
-              <a:rPr lang="en-US" b="1">
+              <a:rPr lang="en-US" b="1" dirty="0">
                 <a:solidFill>
                   <a:srgbClr val="C00000"/>
                 </a:solidFill>
@@ -20744,7 +20767,7 @@
               <a:t>1</a:t>
             </a:r>
             <a:r>
-              <a:rPr lang="en-US" b="1">
+              <a:rPr lang="en-US" b="1" dirty="0">
                 <a:solidFill>
                   <a:schemeClr val="tx1"/>
                 </a:solidFill>
@@ -20765,7 +20788,7 @@
               </a:tabLst>
             </a:pPr>
             <a:r>
-              <a:rPr lang="en-US" b="1">
+              <a:rPr lang="en-US" b="1" dirty="0">
                 <a:solidFill>
                   <a:schemeClr val="tx1"/>
                 </a:solidFill>
@@ -20775,7 +20798,7 @@
               <a:t>    } </a:t>
             </a:r>
             <a:r>
-              <a:rPr lang="en-US" b="1">
+              <a:rPr lang="en-US" b="1" dirty="0">
                 <a:solidFill>
                   <a:srgbClr val="0000FF"/>
                 </a:solidFill>
@@ -20785,7 +20808,7 @@
               <a:t>else</a:t>
             </a:r>
             <a:r>
-              <a:rPr lang="en-US" b="1">
+              <a:rPr lang="en-US" b="1" dirty="0">
                 <a:solidFill>
                   <a:schemeClr val="tx1"/>
                 </a:solidFill>
@@ -20806,7 +20829,7 @@
               </a:tabLst>
             </a:pPr>
             <a:r>
-              <a:rPr lang="en-US" b="1">
+              <a:rPr lang="en-US" b="1" dirty="0">
                 <a:solidFill>
                   <a:schemeClr val="tx1"/>
                 </a:solidFill>
@@ -20816,7 +20839,7 @@
               <a:t>        answer = n * factorial(n - </a:t>
             </a:r>
             <a:r>
-              <a:rPr lang="en-US" b="1">
+              <a:rPr lang="en-US" b="1" dirty="0">
                 <a:solidFill>
                   <a:srgbClr val="C00000"/>
                 </a:solidFill>
@@ -20826,7 +20849,7 @@
               <a:t>1</a:t>
             </a:r>
             <a:r>
-              <a:rPr lang="en-US" b="1">
+              <a:rPr lang="en-US" b="1" dirty="0">
                 <a:solidFill>
                   <a:schemeClr val="tx1"/>
                 </a:solidFill>
@@ -20847,7 +20870,7 @@
               </a:tabLst>
             </a:pPr>
             <a:r>
-              <a:rPr lang="en-US" b="1">
+              <a:rPr lang="en-US" b="1" dirty="0">
                 <a:solidFill>
                   <a:schemeClr val="tx1"/>
                 </a:solidFill>
@@ -20868,7 +20891,7 @@
               </a:tabLst>
             </a:pPr>
             <a:r>
-              <a:rPr lang="en-US" b="1">
+              <a:rPr lang="en-US" b="1" dirty="0">
                 <a:solidFill>
                   <a:schemeClr val="tx1"/>
                 </a:solidFill>
@@ -20878,7 +20901,7 @@
               <a:t>    </a:t>
             </a:r>
             <a:r>
-              <a:rPr lang="en-US" b="1">
+              <a:rPr lang="en-US" b="1" dirty="0">
                 <a:solidFill>
                   <a:srgbClr val="0000FF"/>
                 </a:solidFill>
@@ -20888,7 +20911,7 @@
               <a:t>return</a:t>
             </a:r>
             <a:r>
-              <a:rPr lang="en-US" b="1">
+              <a:rPr lang="en-US" b="1" dirty="0">
                 <a:solidFill>
                   <a:schemeClr val="tx1"/>
                 </a:solidFill>
@@ -20909,7 +20932,7 @@
               </a:tabLst>
             </a:pPr>
             <a:r>
-              <a:rPr lang="en-US" b="1">
+              <a:rPr lang="en-US" b="1" dirty="0">
                 <a:solidFill>
                   <a:schemeClr val="tx1"/>
                 </a:solidFill>
